--- a/docs/deck/svi-pitch-deck.pptx
+++ b/docs/deck/svi-pitch-deck.pptx
@@ -9402,7 +9402,7 @@
                           <a:ea typeface="Arial" pitchFamily="34" charset="-122"/>
                           <a:cs typeface="Arial" pitchFamily="34" charset="-120"/>
                         </a:rPr>
-                        <a:t>Two Pyth feeds in, two quotes out, one instruction. Verifies owner, feed id, verification level, publish time, age and confidence, and refuses on each. 19 tests.</a:t>
+                        <a:t>Two Pyth feeds in, two quotes out, one instruction. Verifies owner, feed id, verification level, publish time, age and confidence, and refuses on each. Thresholds correctable in place. 26 tests.</a:t>
                       </a:r>
                       <a:endParaRPr lang="en-US" sz="1100" dirty="0">
                         <a:latin typeface="Arial" charset="0"/>
@@ -9796,7 +9796,7 @@
                           <a:ea typeface="Arial" pitchFamily="34" charset="-122"/>
                           <a:cs typeface="Arial" pitchFamily="34" charset="-120"/>
                         </a:rPr>
-                        <a:t>Permissionless crank for both feeds, with decoded refusal codes. Posts its own Pyth updates from Hermes where a feed is not sponsored. 22 tests.</a:t>
+                        <a:t>Permissionless crank for both feeds, with decoded refusal codes. Can post its own Pyth updates where a feed is unsponsored, given a Hermes endpoint that serves it. 31 tests.</a:t>
                       </a:r>
                       <a:endParaRPr lang="en-US" sz="1100" dirty="0">
                         <a:latin typeface="Arial" charset="0"/>
@@ -10060,7 +10060,7 @@
                           <a:ea typeface="Arial" pitchFamily="34" charset="-122"/>
                           <a:cs typeface="Arial" pitchFamily="34" charset="-120"/>
                         </a:rPr>
-                        <a:t>Devnet deploy · MARKET_CLOSED observed</a:t>
+                        <a:t>A price source for the stock feeds</a:t>
                       </a:r>
                       <a:endParaRPr lang="en-US" sz="1100" dirty="0">
                         <a:latin typeface="Arial" charset="0"/>
@@ -10119,13 +10119,13 @@
                       <a:r>
                         <a:rPr lang="en-US" sz="1100" b="1" dirty="0">
                           <a:solidFill>
-                            <a:srgbClr val="D97706"/>
+                            <a:srgbClr val="DC2626"/>
                           </a:solidFill>
                           <a:latin typeface="Arial" pitchFamily="34" charset="0"/>
                           <a:ea typeface="Arial" pitchFamily="34" charset="-122"/>
                           <a:cs typeface="Arial" pitchFamily="34" charset="-120"/>
                         </a:rPr>
-                        <a:t>NEXT</a:t>
+                        <a:t>BLOCKED</a:t>
                       </a:r>
                       <a:endParaRPr lang="en-US" sz="1100" dirty="0">
                         <a:latin typeface="Arial" charset="0"/>
@@ -10190,7 +10190,7 @@
                           <a:ea typeface="Arial" pitchFamily="34" charset="-122"/>
                           <a:cs typeface="Arial" pitchFamily="34" charset="-120"/>
                         </a:rPr>
-                        <a:t>Runbook and address planner written and tested: four commands on a machine with a wallet. Turning the flag into a screenshot needs a keeper run across a real 16:00 ET close.</a:t>
+                        <a:t>Measured 18 Sep: Pyth's sponsored equity accounts are 6-34 days stale on mainnet, 78 days on devnet, and two of three xStock accounts do not exist on devnet at all. Hermes now answers 401 without a key. Deployment is four commands; the prices are the gap.</a:t>
                       </a:r>
                       <a:endParaRPr lang="en-US" sz="1100" dirty="0">
                         <a:latin typeface="Arial" charset="0"/>
@@ -10436,6 +10436,203 @@
                   </a:tcPr>
                 </a:tc>
               </a:tr>
+              <a:tr h="566928">
+                <a:tc>
+                  <a:txBody>
+                    <a:bodyPr/>
+                    <a:lstStyle/>
+                    <a:p>
+                      <a:pPr indent="0" marL="0">
+                        <a:buNone/>
+                      </a:pPr>
+                      <a:r>
+                        <a:rPr lang="en-US" sz="1100" dirty="0">
+                          <a:solidFill>
+                            <a:srgbClr val="0F172A"/>
+                          </a:solidFill>
+                          <a:latin typeface="Arial" pitchFamily="34" charset="0"/>
+                          <a:ea typeface="Arial" pitchFamily="34" charset="-122"/>
+                          <a:cs typeface="Arial" pitchFamily="34" charset="-120"/>
+                        </a:rPr>
+                        <a:t>check-pyth.py</a:t>
+                      </a:r>
+                      <a:endParaRPr lang="en-US" sz="1100" dirty="0">
+                        <a:latin typeface="Arial" charset="0"/>
+                        <a:ea typeface="Arial" charset="0"/>
+                        <a:cs typeface="Arial" charset="0"/>
+                      </a:endParaRPr>
+                    </a:p>
+                  </a:txBody>
+                  <a:tcPr marL="91440" marR="91440" marT="45720" marB="45720" anchor="ctr">
+                    <a:lnL w="12700" cap="flat" cmpd="sng" algn="ctr">
+                      <a:solidFill>
+                        <a:srgbClr val="E2E0EC"/>
+                      </a:solidFill>
+                      <a:prstDash val="solid"/>
+                      <a:round/>
+                      <a:headEnd type="none" w="med" len="med"/>
+                      <a:tailEnd type="none" w="med" len="med"/>
+                    </a:lnL>
+                    <a:lnR w="12700" cap="flat" cmpd="sng" algn="ctr">
+                      <a:solidFill>
+                        <a:srgbClr val="E2E0EC"/>
+                      </a:solidFill>
+                      <a:prstDash val="solid"/>
+                      <a:round/>
+                      <a:headEnd type="none" w="med" len="med"/>
+                      <a:tailEnd type="none" w="med" len="med"/>
+                    </a:lnR>
+                    <a:lnT w="12700" cap="flat" cmpd="sng" algn="ctr">
+                      <a:solidFill>
+                        <a:srgbClr val="E2E0EC"/>
+                      </a:solidFill>
+                      <a:prstDash val="solid"/>
+                      <a:round/>
+                      <a:headEnd type="none" w="med" len="med"/>
+                      <a:tailEnd type="none" w="med" len="med"/>
+                    </a:lnT>
+                    <a:lnB w="12700" cap="flat" cmpd="sng" algn="ctr">
+                      <a:solidFill>
+                        <a:srgbClr val="E2E0EC"/>
+                      </a:solidFill>
+                      <a:prstDash val="solid"/>
+                      <a:round/>
+                      <a:headEnd type="none" w="med" len="med"/>
+                      <a:tailEnd type="none" w="med" len="med"/>
+                    </a:lnB>
+                  </a:tcPr>
+                </a:tc>
+                <a:tc>
+                  <a:txBody>
+                    <a:bodyPr/>
+                    <a:lstStyle/>
+                    <a:p>
+                      <a:pPr indent="0" marL="0">
+                        <a:buNone/>
+                      </a:pPr>
+                      <a:r>
+                        <a:rPr lang="en-US" sz="1100" b="1" dirty="0">
+                          <a:solidFill>
+                            <a:srgbClr val="16A34A"/>
+                          </a:solidFill>
+                          <a:latin typeface="Arial" pitchFamily="34" charset="0"/>
+                          <a:ea typeface="Arial" pitchFamily="34" charset="-122"/>
+                          <a:cs typeface="Arial" pitchFamily="34" charset="-120"/>
+                        </a:rPr>
+                        <a:t>DONE</a:t>
+                      </a:r>
+                      <a:endParaRPr lang="en-US" sz="1100" dirty="0">
+                        <a:latin typeface="Arial" charset="0"/>
+                        <a:ea typeface="Arial" charset="0"/>
+                        <a:cs typeface="Arial" charset="0"/>
+                      </a:endParaRPr>
+                    </a:p>
+                  </a:txBody>
+                  <a:tcPr marL="91440" marR="91440" marT="45720" marB="45720" anchor="ctr">
+                    <a:lnL w="12700" cap="flat" cmpd="sng" algn="ctr">
+                      <a:solidFill>
+                        <a:srgbClr val="E2E0EC"/>
+                      </a:solidFill>
+                      <a:prstDash val="solid"/>
+                      <a:round/>
+                      <a:headEnd type="none" w="med" len="med"/>
+                      <a:tailEnd type="none" w="med" len="med"/>
+                    </a:lnL>
+                    <a:lnR w="12700" cap="flat" cmpd="sng" algn="ctr">
+                      <a:solidFill>
+                        <a:srgbClr val="E2E0EC"/>
+                      </a:solidFill>
+                      <a:prstDash val="solid"/>
+                      <a:round/>
+                      <a:headEnd type="none" w="med" len="med"/>
+                      <a:tailEnd type="none" w="med" len="med"/>
+                    </a:lnR>
+                    <a:lnT w="12700" cap="flat" cmpd="sng" algn="ctr">
+                      <a:solidFill>
+                        <a:srgbClr val="E2E0EC"/>
+                      </a:solidFill>
+                      <a:prstDash val="solid"/>
+                      <a:round/>
+                      <a:headEnd type="none" w="med" len="med"/>
+                      <a:tailEnd type="none" w="med" len="med"/>
+                    </a:lnT>
+                    <a:lnB w="12700" cap="flat" cmpd="sng" algn="ctr">
+                      <a:solidFill>
+                        <a:srgbClr val="E2E0EC"/>
+                      </a:solidFill>
+                      <a:prstDash val="solid"/>
+                      <a:round/>
+                      <a:headEnd type="none" w="med" len="med"/>
+                      <a:tailEnd type="none" w="med" len="med"/>
+                    </a:lnB>
+                  </a:tcPr>
+                </a:tc>
+                <a:tc>
+                  <a:txBody>
+                    <a:bodyPr/>
+                    <a:lstStyle/>
+                    <a:p>
+                      <a:pPr indent="0" marL="0">
+                        <a:buNone/>
+                      </a:pPr>
+                      <a:r>
+                        <a:rPr lang="en-US" sz="1100" dirty="0">
+                          <a:solidFill>
+                            <a:srgbClr val="0F172A"/>
+                          </a:solidFill>
+                          <a:latin typeface="Arial" pitchFamily="34" charset="0"/>
+                          <a:ea typeface="Arial" pitchFamily="34" charset="-122"/>
+                          <a:cs typeface="Arial" pitchFamily="34" charset="-120"/>
+                        </a:rPr>
+                        <a:t>Asks a cluster whether the feeds a deployment needs are fresh, correctly identified and fully verified, and says which of the three answers you have. It is how the row above was measured.</a:t>
+                      </a:r>
+                      <a:endParaRPr lang="en-US" sz="1100" dirty="0">
+                        <a:latin typeface="Arial" charset="0"/>
+                        <a:ea typeface="Arial" charset="0"/>
+                        <a:cs typeface="Arial" charset="0"/>
+                      </a:endParaRPr>
+                    </a:p>
+                  </a:txBody>
+                  <a:tcPr marL="91440" marR="91440" marT="45720" marB="45720" anchor="ctr">
+                    <a:lnL w="12700" cap="flat" cmpd="sng" algn="ctr">
+                      <a:solidFill>
+                        <a:srgbClr val="E2E0EC"/>
+                      </a:solidFill>
+                      <a:prstDash val="solid"/>
+                      <a:round/>
+                      <a:headEnd type="none" w="med" len="med"/>
+                      <a:tailEnd type="none" w="med" len="med"/>
+                    </a:lnL>
+                    <a:lnR w="12700" cap="flat" cmpd="sng" algn="ctr">
+                      <a:solidFill>
+                        <a:srgbClr val="E2E0EC"/>
+                      </a:solidFill>
+                      <a:prstDash val="solid"/>
+                      <a:round/>
+                      <a:headEnd type="none" w="med" len="med"/>
+                      <a:tailEnd type="none" w="med" len="med"/>
+                    </a:lnR>
+                    <a:lnT w="12700" cap="flat" cmpd="sng" algn="ctr">
+                      <a:solidFill>
+                        <a:srgbClr val="E2E0EC"/>
+                      </a:solidFill>
+                      <a:prstDash val="solid"/>
+                      <a:round/>
+                      <a:headEnd type="none" w="med" len="med"/>
+                      <a:tailEnd type="none" w="med" len="med"/>
+                    </a:lnT>
+                    <a:lnB w="12700" cap="flat" cmpd="sng" algn="ctr">
+                      <a:solidFill>
+                        <a:srgbClr val="E2E0EC"/>
+                      </a:solidFill>
+                      <a:prstDash val="solid"/>
+                      <a:round/>
+                      <a:headEnd type="none" w="med" len="med"/>
+                      <a:tailEnd type="none" w="med" len="med"/>
+                    </a:lnB>
+                  </a:tcPr>
+                </a:tc>
+              </a:tr>
             </a:tbl>
           </a:graphicData>
         </a:graphic>
@@ -10514,7 +10711,7 @@
                 <a:ea typeface="Arial" pitchFamily="34" charset="-122"/>
                 <a:cs typeface="Arial" pitchFamily="34" charset="-120"/>
               </a:rPr>
-              <a:t>It is a deployment, one observed market close, and a first consumer.</a:t>
+              <a:t>It is a price source for the stock feeds, and a first consumer. The Hylo feed needs neither.</a:t>
             </a:r>
             <a:endParaRPr lang="en-US" sz="1500" dirty="0"/>
           </a:p>
@@ -15405,7 +15602,7 @@
                 <a:ea typeface="Arial" pitchFamily="34" charset="-122"/>
                 <a:cs typeface="Arial" pitchFamily="34" charset="-120"/>
               </a:rPr>
-              <a:t>“Isn't this just a Hylo wrapper?”</a:t>
+              <a:t>“Doesn't Pyth already do this?”</a:t>
             </a:r>
             <a:endParaRPr lang="en-US" sz="1450" dirty="0"/>
           </a:p>
@@ -15447,7 +15644,7 @@
                 <a:ea typeface="Arial" pitchFamily="34" charset="-122"/>
                 <a:cs typeface="Arial" pitchFamily="34" charset="-120"/>
               </a:rPr>
-              <a:t>Today, yes, and the roadmap says so. The interface is the product: a second adapter that ships with zero changes to core or the wire format is the test, and it is stage 4. Until then, judge the design by whether the first adapter needed any cooperation from Hylo. It did not.</a:t>
+              <a:t>For stocks it nearly does: Pyth publishes the share and the token as two unrelated feeds. Nobody publishes the relationship, and nobody refuses — Pyth will serve a 34-day-old AAPL price without complaint. For xSOL there is no feed at all: its NAV is computed from Hylo's own reserves, and that number exists nowhere else. We are a valuation layer, not a second price oracle.</a:t>
             </a:r>
             <a:endParaRPr lang="en-US" sz="1150" dirty="0"/>
           </a:p>
@@ -15759,7 +15956,7 @@
                 <a:ea typeface="Arial" pitchFamily="34" charset="-122"/>
                 <a:cs typeface="Arial" pitchFamily="34" charset="-120"/>
               </a:rPr>
-              <a:t>“What's in it for you?”</a:t>
+              <a:t>“Where does your price come from, and what when it stops?”</a:t>
             </a:r>
             <a:endParaRPr lang="en-US" sz="1450" dirty="0"/>
           </a:p>
@@ -15801,7 +15998,7 @@
                 <a:ea typeface="Arial" pitchFamily="34" charset="-122"/>
                 <a:cs typeface="Arial" pitchFamily="34" charset="-120"/>
               </a:rPr>
-              <a:t>Reputation, a Colosseum submission with a working feed, and a shot at authoring a Solana standard. Not revenue — the standard and SDKs are permanently free and there is no token. Worth being blunt about, because an unexplained motivation is its own kind of risk.</a:t>
+              <a:t>It has stopped. Pyth's sponsored stock accounts are 6-34 days stale on mainnet and mostly absent on devnet; Hermes now needs a key. So the stock feeds need a price source we do not yet have, and we say so on the status slide. The xSOL feed is unaffected — it reads Hylo's accounts directly. Our answer to a dead feed is the product: refuse, visibly, rather than publish the last thing we saw.</a:t>
             </a:r>
             <a:endParaRPr lang="en-US" sz="1150" dirty="0"/>
           </a:p>

--- a/docs/deck/svi-pitch-deck.pptx
+++ b/docs/deck/svi-pitch-deck.pptx
@@ -8669,7 +8669,7 @@
                 <a:ea typeface="Arial" pitchFamily="34" charset="-122"/>
                 <a:cs typeface="Arial" pitchFamily="34" charset="-120"/>
               </a:rPr>
-              <a:t>A worked example: 100,000 xSOL deposited → the market reads valid_until ≥ now, flags clear, lower bound $0.060285498 → $6,028.55 of collateral → $3,617 borrowable at 60% LTV. When valid_until passes, refuse new borrows; never guess.</a:t>
+              <a:t>A worked example: 100,000 xSOL deposited → the market reads valid_until ≥ now, flags clear, lower bound $0.069715188 → $6,971.52 of collateral → $4,183 borrowable at 60% LTV. When valid_until passes, refuse new borrows; never guess.</a:t>
             </a:r>
             <a:endParaRPr lang="en-US" sz="1200" dirty="0"/>
           </a:p>
@@ -9599,7 +9599,7 @@
                           <a:ea typeface="Arial" pitchFamily="34" charset="-122"/>
                           <a:cs typeface="Arial" pitchFamily="34" charset="-120"/>
                         </a:rPr>
-                        <a:t>Adapter #2: xSOL NAV computed by subtraction from Hylo's vault, hylo-core pinned to a commit. 17 tests, including a live run on a mainnet fork.</a:t>
+                        <a:t>Adapter #2: xSOL NAV computed by subtraction from Hylo's vault, hylo-core pinned to a commit. 17 tests. Published a real quote on a mainnet fork on 18 Sep, matched to the ninth decimal by an independent reader.</a:t>
                       </a:r>
                       <a:endParaRPr lang="en-US" sz="1100" dirty="0">
                         <a:latin typeface="Arial" charset="0"/>
@@ -16186,7 +16186,7 @@
                 <a:ea typeface="Arial" pitchFamily="34" charset="-122"/>
                 <a:cs typeface="Arial" pitchFamily="34" charset="-120"/>
               </a:rPr>
-              <a:t>Before stocks, the same core published a leveraged token's NAV — computed by subtraction from a protocol's vault, nothing like a Pyth feed. 10 Sep 2026, on a fork of Solana mainnet with Hylo's real accounts re-cloned seconds before.</a:t>
+              <a:t>Before stocks, the same core published a leveraged token's NAV — computed by subtraction from a protocol's vault, nothing like a Pyth feed. 18 Sep 2026, on a fork of Solana mainnet with Hylo's real accounts re-cloned seconds before.</a:t>
             </a:r>
             <a:endParaRPr lang="en-US" sz="1400" dirty="0"/>
           </a:p>
@@ -16259,7 +16259,7 @@
                 <a:ea typeface="Arial" pitchFamily="34" charset="-122"/>
                 <a:cs typeface="Arial" pitchFamily="34" charset="-120"/>
               </a:rPr>
-              <a:t>$0.0603</a:t>
+              <a:t>$0.0697</a:t>
             </a:r>
             <a:endParaRPr lang="en-US" sz="3600" dirty="0"/>
           </a:p>
@@ -16298,7 +16298,7 @@
                 <a:ea typeface="Arial" pitchFamily="34" charset="-122"/>
                 <a:cs typeface="Arial" pitchFamily="34" charset="-120"/>
               </a:rPr>
-              <a:t>per xSOL — $0.060285498,</a:t>
+              <a:t>per xSOL — $0.069715188,</a:t>
             </a:r>
             <a:endParaRPr lang="en-US" sz="1150" dirty="0"/>
           </a:p>
@@ -16388,7 +16388,7 @@
                 <a:ea typeface="Arial" pitchFamily="34" charset="-122"/>
                 <a:cs typeface="Arial" pitchFamily="34" charset="-120"/>
               </a:rPr>
-              <a:t>4.9 bps</a:t>
+              <a:t>13.5 bps</a:t>
             </a:r>
             <a:endParaRPr lang="en-US" sz="3600" dirty="0"/>
           </a:p>
@@ -16427,7 +16427,7 @@
                 <a:ea typeface="Arial" pitchFamily="34" charset="-122"/>
                 <a:cs typeface="Arial" pitchFamily="34" charset="-120"/>
               </a:rPr>
-              <a:t>wide band: redeem $0.060285498,</a:t>
+              <a:t>wide band: redeem $0.069715188,</a:t>
             </a:r>
             <a:endParaRPr lang="en-US" sz="1150" dirty="0"/>
           </a:p>
@@ -16444,7 +16444,7 @@
                 <a:ea typeface="Arial" pitchFamily="34" charset="-122"/>
                 <a:cs typeface="Arial" pitchFamily="34" charset="-120"/>
               </a:rPr>
-              <a:t>mint $0.060315053</a:t>
+              <a:t>mint $0.069809602</a:t>
             </a:r>
             <a:endParaRPr lang="en-US" sz="1150" dirty="0"/>
           </a:p>
@@ -16768,7 +16768,7 @@
                 <a:ea typeface="Courier New" pitchFamily="34" charset="-122"/>
                 <a:cs typeface="Courier New" pitchFamily="34" charset="-120"/>
               </a:rPr>
-              <a:t>PUBLISHED QUOTE  ·  G28Ba5F9X71Pih2SNobXyU98tjQdga1Ztbzqg3PU4rWj</a:t>
+              <a:t>PUBLISHED QUOTE  ·  2EhQfH26gQBxi8RteUVCXXA5MMnwuLZgFnMqQxLkseuc</a:t>
             </a:r>
             <a:endParaRPr lang="en-US" sz="950" dirty="0"/>
           </a:p>
@@ -16810,7 +16810,7 @@
                 <a:ea typeface="Courier New" pitchFamily="34" charset="-122"/>
                 <a:cs typeface="Courier New" pitchFamily="34" charset="-120"/>
               </a:rPr>
-              <a:t>quote_amount    $ 0.060285498</a:t>
+              <a:t>quote_amount    $ 0.069715188</a:t>
             </a:r>
             <a:endParaRPr lang="en-US" sz="1200" dirty="0"/>
           </a:p>
@@ -16830,7 +16830,7 @@
                 <a:ea typeface="Courier New" pitchFamily="34" charset="-122"/>
                 <a:cs typeface="Courier New" pitchFamily="34" charset="-120"/>
               </a:rPr>
-              <a:t>lower / upper   $ 0.060285498 .. $ 0.060315053</a:t>
+              <a:t>lower / upper   $ 0.069715188 .. $ 0.069809602</a:t>
             </a:r>
             <a:endParaRPr lang="en-US" sz="1200" dirty="0"/>
           </a:p>
@@ -16870,7 +16870,7 @@
                 <a:ea typeface="Courier New" pitchFamily="34" charset="-122"/>
                 <a:cs typeface="Courier New" pitchFamily="34" charset="-120"/>
               </a:rPr>
-              <a:t>observed_slot   445953445   valid_until 445954195</a:t>
+              <a:t>observed_slot   448083727   valid_until 448084477</a:t>
             </a:r>
             <a:endParaRPr lang="en-US" sz="1200" dirty="0"/>
           </a:p>
@@ -16910,7 +16910,7 @@
                 <a:ea typeface="Courier New" pitchFamily="34" charset="-122"/>
                 <a:cs typeface="Courier New" pitchFamily="34" charset="-120"/>
               </a:rPr>
-              <a:t>off-chain hylo-core:  $ 0.060285498   MATCH</a:t>
+              <a:t>off-chain hylo-core:  $ 0.069715188   MATCH</a:t>
             </a:r>
             <a:endParaRPr lang="en-US" sz="1200" dirty="0"/>
           </a:p>

--- a/docs/deck/svi-pitch-deck.pptx
+++ b/docs/deck/svi-pitch-deck.pptx
@@ -13656,7 +13656,7 @@
                 <a:ea typeface="Arial" pitchFamily="34" charset="-122"/>
                 <a:cs typeface="Arial" pitchFamily="34" charset="-120"/>
               </a:rPr>
-              <a:t>DONE · 10 Sep</a:t>
+              <a:t>DONE · 18 Sep</a:t>
             </a:r>
             <a:endParaRPr lang="en-US" sz="1250" dirty="0"/>
           </a:p>
@@ -13996,7 +13996,7 @@
                 <a:ea typeface="Arial" pitchFamily="34" charset="-122"/>
                 <a:cs typeface="Arial" pitchFamily="34" charset="-120"/>
               </a:rPr>
-              <a:t>Zero divergence over 72 h through two RPCs. Third-party audit before any real collateral.</a:t>
+              <a:t>Zero divergence over 72 h through two RPCs; that run sets the ORACLE_DIVERGENT tolerance. Audit before any real collateral.</a:t>
             </a:r>
             <a:endParaRPr lang="en-US" sz="1200" dirty="0"/>
           </a:p>
